--- a/PPT-version/MCP/MCP-讲义.pptx
+++ b/PPT-version/MCP/MCP-讲义.pptx
@@ -48641,7 +48641,7 @@
                 </a:solidFill>
                 <a:latin typeface="Calibri"/>
               </a:rPr>
-              <a:t>2026 年 6 月，NSA / CISA 等发布《MCP: Security Design Considerations》——从架构设计角度给出 MCP 安全建议，覆盖认证授权、供应链可信、注入面防护、部署边界等。（本模块 ebooks/ 已归档该 PDF。）</a:t>
+              <a:t>2026 年 6 月，NSA / CISA 等发布《MCP: Security Design Considerations》——从架构设计角度给出 MCP 安全建议，覆盖认证授权、供应链可信、注入面防护、部署边界等。（见本模块书单 #4。）</a:t>
             </a:r>
           </a:p>
         </p:txBody>
@@ -53389,7 +53389,7 @@
                 </a:solidFill>
                 <a:latin typeface="Calibri"/>
               </a:rPr>
-              <a:t>NSA/CISA 2026-06 官方安全设计指引已就位（ebooks/ 已归档），是给客户的合规对标与背书依据。</a:t>
+              <a:t>NSA/CISA 2026-06 官方安全设计指引已就位（书单 #4），是给客户的合规对标与背书依据。</a:t>
             </a:r>
           </a:p>
         </p:txBody>

--- a/PPT-version/MCP/MCP-讲义.pptx
+++ b/PPT-version/MCP/MCP-讲义.pptx
@@ -59,6 +59,7 @@
     <p:sldId id="302" r:id="rId53"/>
     <p:sldId id="303" r:id="rId54"/>
     <p:sldId id="304" r:id="rId55"/>
+    <p:sldId id="334" r:id="rId85"/>
     <p:sldId id="305" r:id="rId56"/>
     <p:sldId id="306" r:id="rId57"/>
     <p:sldId id="307" r:id="rId58"/>
@@ -67147,7 +67148,7 @@
                 <a:latin typeface="Calibri"/>
                 <a:ea typeface="Calibri"/>
               </a:rPr>
-              <a:t>registry 官方页</a:t>
+              <a:t>registry 官方页；成本＝Atlassian《MCP Compression》2026-03-29、网关延迟＝Envoy AI Gateway 基准 2025-12-08</a:t>
             </a:r>
           </a:p>
         </p:txBody>
@@ -67365,7 +67366,7 @@
                 <a:latin typeface="Calibri"/>
                 <a:ea typeface="Calibri"/>
               </a:rPr>
-              <a:t>核实窗口 2026-07-08 至 2026-07-12　·　保鲜机制：季度巡检（每年 1/4/7/10 月）＋ 建议复查日定点复查　·　引用任何数字前先核日期</a:t>
+              <a:t>核实窗口 2026-07-08 至 2026-07-21　·　保鲜机制：季度巡检（每年 1/4/7/10 月）＋ 建议复查日定点复查　·　引用任何数字前先核日期</a:t>
             </a:r>
           </a:p>
         </p:txBody>
@@ -68134,6 +68135,839 @@
                 <a:ea typeface="Calibri"/>
               </a:rPr>
               <a:t>数字弹药</a:t>
+            </a:r>
+          </a:p>
+        </p:txBody>
+      </p:sp>
+    </p:spTree>
+  </p:cSld>
+  <p:clrMapOvr>
+    <a:masterClrMapping/>
+  </p:clrMapOvr>
+</p:sld>
+</file>
+
+<file path=ppt/slides/slide79.xml><?xml version="1.0" encoding="utf-8"?>
+<p:sld xmlns:a="http://schemas.openxmlformats.org/drawingml/2006/main" xmlns:p="http://schemas.openxmlformats.org/presentationml/2006/main" xmlns:r="http://schemas.openxmlformats.org/officeDocument/2006/relationships">
+  <p:cSld>
+    <p:spTree>
+      <p:nvGrpSpPr>
+        <p:cNvPr id="1" name=""/>
+        <p:cNvGrpSpPr/>
+        <p:nvPr/>
+      </p:nvGrpSpPr>
+      <p:grpSpPr/>
+      <p:sp>
+        <p:nvSpPr>
+          <p:cNvPr id="2" name="Rectangle 1"/>
+          <p:cNvSpPr/>
+          <p:nvPr/>
+        </p:nvSpPr>
+        <p:spPr>
+          <a:xfrm>
+            <a:off x="0" y="0"/>
+            <a:ext cx="12191695" cy="6858000"/>
+          </a:xfrm>
+          <a:prstGeom prst="rect">
+            <a:avLst/>
+          </a:prstGeom>
+          <a:solidFill>
+            <a:srgbClr val="FEFEFE"/>
+          </a:solidFill>
+          <a:ln w="9525">
+            <a:solidFill>
+              <a:srgbClr val="FEFEFE"/>
+            </a:solidFill>
+          </a:ln>
+          <a:effectLst/>
+        </p:spPr>
+        <p:style>
+          <a:lnRef idx="1">
+            <a:schemeClr val="accent1"/>
+          </a:lnRef>
+          <a:fillRef idx="3">
+            <a:schemeClr val="accent1"/>
+          </a:fillRef>
+          <a:effectRef idx="2">
+            <a:schemeClr val="accent1"/>
+          </a:effectRef>
+          <a:fontRef idx="minor">
+            <a:schemeClr val="lt1"/>
+          </a:fontRef>
+        </p:style>
+        <p:txBody>
+          <a:bodyPr rtlCol="0" anchor="ctr"/>
+          <a:lstStyle/>
+          <a:p>
+            <a:pPr algn="ctr"/>
+          </a:p>
+        </p:txBody>
+      </p:sp>
+      <p:sp>
+        <p:nvSpPr>
+          <p:cNvPr id="3" name="TextBox 2"/>
+          <p:cNvSpPr txBox="1"/>
+          <p:nvPr/>
+        </p:nvSpPr>
+        <p:spPr>
+          <a:xfrm>
+            <a:off x="502920" y="292608"/>
+            <a:ext cx="10789920" cy="365760"/>
+          </a:xfrm>
+          <a:prstGeom prst="rect">
+            <a:avLst/>
+          </a:prstGeom>
+          <a:noFill/>
+        </p:spPr>
+        <p:txBody>
+          <a:bodyPr wrap="square" lIns="45720" rIns="45720" tIns="18288" bIns="18288">
+            <a:spAutoFit/>
+          </a:bodyPr>
+          <a:lstStyle/>
+          <a:p>
+            <a:r>
+              <a:rPr sz="1300" b="1" i="0">
+                <a:solidFill>
+                  <a:srgbClr val="128199"/>
+                </a:solidFill>
+                <a:latin typeface="Calibri"/>
+                <a:ea typeface="Calibri"/>
+              </a:rPr>
+              <a:t>第 5 章 · 生产落地   RUNTIME COST</a:t>
+            </a:r>
+          </a:p>
+        </p:txBody>
+      </p:sp>
+      <p:sp>
+        <p:nvSpPr>
+          <p:cNvPr id="4" name="TextBox 3"/>
+          <p:cNvSpPr txBox="1"/>
+          <p:nvPr/>
+        </p:nvSpPr>
+        <p:spPr>
+          <a:xfrm>
+            <a:off x="502920" y="603504"/>
+            <a:ext cx="11155680" cy="868680"/>
+          </a:xfrm>
+          <a:prstGeom prst="rect">
+            <a:avLst/>
+          </a:prstGeom>
+          <a:noFill/>
+        </p:spPr>
+        <p:txBody>
+          <a:bodyPr wrap="square" lIns="45720" rIns="45720" tIns="18288" bIns="18288">
+            <a:spAutoFit/>
+          </a:bodyPr>
+          <a:lstStyle/>
+          <a:p>
+            <a:r>
+              <a:rPr sz="2700" b="1" i="0">
+                <a:solidFill>
+                  <a:srgbClr val="1A2733"/>
+                </a:solidFill>
+                <a:latin typeface="Cambria"/>
+                <a:ea typeface="Cambria"/>
+              </a:rPr>
+              <a:t>运行期成本：贵在上下文，不在调用</a:t>
+            </a:r>
+          </a:p>
+        </p:txBody>
+      </p:sp>
+      <p:sp>
+        <p:nvSpPr>
+          <p:cNvPr id="5" name="TextBox 4"/>
+          <p:cNvSpPr txBox="1"/>
+          <p:nvPr/>
+        </p:nvSpPr>
+        <p:spPr>
+          <a:xfrm>
+            <a:off x="502920" y="1389888"/>
+            <a:ext cx="11183112" cy="685800"/>
+          </a:xfrm>
+          <a:prstGeom prst="rect">
+            <a:avLst/>
+          </a:prstGeom>
+          <a:noFill/>
+        </p:spPr>
+        <p:txBody>
+          <a:bodyPr wrap="square" lIns="45720" rIns="45720" tIns="18288" bIns="18288">
+            <a:spAutoFit/>
+          </a:bodyPr>
+          <a:lstStyle/>
+          <a:p>
+            <a:pPr algn="l"/>
+            <a:r>
+              <a:rPr sz="1250" b="0" i="0">
+                <a:solidFill>
+                  <a:srgbClr val="1A2733"/>
+                </a:solidFill>
+                <a:latin typeface="Calibri"/>
+                <a:ea typeface="Calibri"/>
+              </a:rPr>
+              <a:t>客户问「这东西贵不贵」，答案常不在他以为的地方。MCP 的运行期开销主要不是每次调用的网络往返，而是工具定义常驻上下文——而且它随每一条消息进上下文，不是每会话一次，所以成本是按轮次乘的。</a:t>
+            </a:r>
+          </a:p>
+        </p:txBody>
+      </p:sp>
+      <p:sp>
+        <p:nvSpPr>
+          <p:cNvPr id="6" name="Rounded Rectangle 5"/>
+          <p:cNvSpPr/>
+          <p:nvPr/>
+        </p:nvSpPr>
+        <p:spPr>
+          <a:xfrm>
+            <a:off x="502920" y="2194560"/>
+            <a:ext cx="3544824" cy="2395728"/>
+          </a:xfrm>
+          <a:prstGeom prst="roundRect">
+            <a:avLst>
+              <a:gd name="adj" fmla="val 4000"/>
+            </a:avLst>
+          </a:prstGeom>
+          <a:solidFill>
+            <a:srgbClr val="F3F8FA"/>
+          </a:solidFill>
+          <a:ln w="12700">
+            <a:solidFill>
+              <a:srgbClr val="D6E1E8"/>
+            </a:solidFill>
+          </a:ln>
+          <a:effectLst/>
+        </p:spPr>
+        <p:style>
+          <a:lnRef idx="1">
+            <a:schemeClr val="accent1"/>
+          </a:lnRef>
+          <a:fillRef idx="3">
+            <a:schemeClr val="accent1"/>
+          </a:fillRef>
+          <a:effectRef idx="2">
+            <a:schemeClr val="accent1"/>
+          </a:effectRef>
+          <a:fontRef idx="minor">
+            <a:schemeClr val="lt1"/>
+          </a:fontRef>
+        </p:style>
+        <p:txBody>
+          <a:bodyPr rtlCol="0" anchor="ctr"/>
+          <a:lstStyle/>
+          <a:p>
+            <a:pPr algn="ctr"/>
+          </a:p>
+        </p:txBody>
+      </p:sp>
+      <p:sp>
+        <p:nvSpPr>
+          <p:cNvPr id="7" name="TextBox 6"/>
+          <p:cNvSpPr txBox="1"/>
+          <p:nvPr/>
+        </p:nvSpPr>
+        <p:spPr>
+          <a:xfrm>
+            <a:off x="667512" y="2340864"/>
+            <a:ext cx="3215640" cy="566928"/>
+          </a:xfrm>
+          <a:prstGeom prst="rect">
+            <a:avLst/>
+          </a:prstGeom>
+          <a:noFill/>
+        </p:spPr>
+        <p:txBody>
+          <a:bodyPr wrap="square" lIns="45720" rIns="45720" tIns="18288" bIns="18288">
+            <a:spAutoFit/>
+          </a:bodyPr>
+          <a:lstStyle/>
+          <a:p>
+            <a:r>
+              <a:rPr sz="2500" b="1" i="0">
+                <a:solidFill>
+                  <a:srgbClr val="128199"/>
+                </a:solidFill>
+                <a:latin typeface="Cambria"/>
+                <a:ea typeface="Cambria"/>
+              </a:rPr>
+              <a:t>17.6k</a:t>
+            </a:r>
+            <a:r>
+              <a:rPr sz="1200" b="0" i="0">
+                <a:solidFill>
+                  <a:srgbClr val="51606E"/>
+                </a:solidFill>
+                <a:latin typeface="Calibri"/>
+                <a:ea typeface="Calibri"/>
+              </a:rPr>
+              <a:t>  tokens</a:t>
+            </a:r>
+          </a:p>
+        </p:txBody>
+      </p:sp>
+      <p:sp>
+        <p:nvSpPr>
+          <p:cNvPr id="8" name="TextBox 7"/>
+          <p:cNvSpPr txBox="1"/>
+          <p:nvPr/>
+        </p:nvSpPr>
+        <p:spPr>
+          <a:xfrm>
+            <a:off x="667512" y="2980944"/>
+            <a:ext cx="3215640" cy="822960"/>
+          </a:xfrm>
+          <a:prstGeom prst="rect">
+            <a:avLst/>
+          </a:prstGeom>
+          <a:noFill/>
+        </p:spPr>
+        <p:txBody>
+          <a:bodyPr wrap="square" lIns="45720" rIns="45720" tIns="18288" bIns="18288">
+            <a:spAutoFit/>
+          </a:bodyPr>
+          <a:lstStyle/>
+          <a:p>
+            <a:pPr algn="l"/>
+            <a:r>
+              <a:rPr sz="1150" b="0" i="0">
+                <a:solidFill>
+                  <a:srgbClr val="1A2733"/>
+                </a:solidFill>
+                <a:latin typeface="Calibri"/>
+                <a:ea typeface="Calibri"/>
+              </a:rPr>
+              <a:t>GitHub 官方 MCP server 暴露 94 个工具，仅工具定义就占约 17,600 tokens。</a:t>
+            </a:r>
+          </a:p>
+        </p:txBody>
+      </p:sp>
+      <p:sp>
+        <p:nvSpPr>
+          <p:cNvPr id="9" name="TextBox 8"/>
+          <p:cNvSpPr txBox="1"/>
+          <p:nvPr/>
+        </p:nvSpPr>
+        <p:spPr>
+          <a:xfrm>
+            <a:off x="667512" y="3822191"/>
+            <a:ext cx="3215640" cy="713232"/>
+          </a:xfrm>
+          <a:prstGeom prst="rect">
+            <a:avLst/>
+          </a:prstGeom>
+          <a:noFill/>
+        </p:spPr>
+        <p:txBody>
+          <a:bodyPr wrap="square" lIns="45720" rIns="45720" tIns="18288" bIns="18288">
+            <a:spAutoFit/>
+          </a:bodyPr>
+          <a:lstStyle/>
+          <a:p>
+            <a:pPr algn="l"/>
+            <a:r>
+              <a:rPr sz="1100" b="0" i="0">
+                <a:solidFill>
+                  <a:srgbClr val="51606E"/>
+                </a:solidFill>
+                <a:latin typeface="Calibri"/>
+                <a:ea typeface="Calibri"/>
+              </a:rPr>
+              <a:t>边界：Atlassian 工程博客 2026-03-29，未公布模型与计数方法。这是单个大 server 的量级，不能外推成「每个 server 都这么贵」——工具少、描述简的只有几百到几千。</a:t>
+            </a:r>
+          </a:p>
+        </p:txBody>
+      </p:sp>
+      <p:sp>
+        <p:nvSpPr>
+          <p:cNvPr id="10" name="Rounded Rectangle 9"/>
+          <p:cNvSpPr/>
+          <p:nvPr/>
+        </p:nvSpPr>
+        <p:spPr>
+          <a:xfrm>
+            <a:off x="4322064" y="2194560"/>
+            <a:ext cx="3544824" cy="2395728"/>
+          </a:xfrm>
+          <a:prstGeom prst="roundRect">
+            <a:avLst>
+              <a:gd name="adj" fmla="val 4000"/>
+            </a:avLst>
+          </a:prstGeom>
+          <a:solidFill>
+            <a:srgbClr val="F3F8FA"/>
+          </a:solidFill>
+          <a:ln w="12700">
+            <a:solidFill>
+              <a:srgbClr val="D6E1E8"/>
+            </a:solidFill>
+          </a:ln>
+          <a:effectLst/>
+        </p:spPr>
+        <p:style>
+          <a:lnRef idx="1">
+            <a:schemeClr val="accent1"/>
+          </a:lnRef>
+          <a:fillRef idx="3">
+            <a:schemeClr val="accent1"/>
+          </a:fillRef>
+          <a:effectRef idx="2">
+            <a:schemeClr val="accent1"/>
+          </a:effectRef>
+          <a:fontRef idx="minor">
+            <a:schemeClr val="lt1"/>
+          </a:fontRef>
+        </p:style>
+        <p:txBody>
+          <a:bodyPr rtlCol="0" anchor="ctr"/>
+          <a:lstStyle/>
+          <a:p>
+            <a:pPr algn="ctr"/>
+          </a:p>
+        </p:txBody>
+      </p:sp>
+      <p:sp>
+        <p:nvSpPr>
+          <p:cNvPr id="11" name="TextBox 10"/>
+          <p:cNvSpPr txBox="1"/>
+          <p:nvPr/>
+        </p:nvSpPr>
+        <p:spPr>
+          <a:xfrm>
+            <a:off x="4486656" y="2340864"/>
+            <a:ext cx="3215640" cy="566928"/>
+          </a:xfrm>
+          <a:prstGeom prst="rect">
+            <a:avLst/>
+          </a:prstGeom>
+          <a:noFill/>
+        </p:spPr>
+        <p:txBody>
+          <a:bodyPr wrap="square" lIns="45720" rIns="45720" tIns="18288" bIns="18288">
+            <a:spAutoFit/>
+          </a:bodyPr>
+          <a:lstStyle/>
+          <a:p>
+            <a:r>
+              <a:rPr sz="2500" b="1" i="0">
+                <a:solidFill>
+                  <a:srgbClr val="128199"/>
+                </a:solidFill>
+                <a:latin typeface="Cambria"/>
+                <a:ea typeface="Cambria"/>
+              </a:rPr>
+              <a:t>~3.9k → ~0.5k</a:t>
+            </a:r>
+            <a:r>
+              <a:rPr sz="1200" b="0" i="0">
+                <a:solidFill>
+                  <a:srgbClr val="51606E"/>
+                </a:solidFill>
+                <a:latin typeface="Calibri"/>
+                <a:ea typeface="Calibri"/>
+              </a:rPr>
+              <a:t>  压缩后</a:t>
+            </a:r>
+          </a:p>
+        </p:txBody>
+      </p:sp>
+      <p:sp>
+        <p:nvSpPr>
+          <p:cNvPr id="12" name="TextBox 11"/>
+          <p:cNvSpPr txBox="1"/>
+          <p:nvPr/>
+        </p:nvSpPr>
+        <p:spPr>
+          <a:xfrm>
+            <a:off x="4486656" y="2980944"/>
+            <a:ext cx="3215640" cy="822960"/>
+          </a:xfrm>
+          <a:prstGeom prst="rect">
+            <a:avLst/>
+          </a:prstGeom>
+          <a:noFill/>
+        </p:spPr>
+        <p:txBody>
+          <a:bodyPr wrap="square" lIns="45720" rIns="45720" tIns="18288" bIns="18288">
+            <a:spAutoFit/>
+          </a:bodyPr>
+          <a:lstStyle/>
+          <a:p>
+            <a:pPr algn="l"/>
+            <a:r>
+              <a:rPr sz="1150" b="0" i="0">
+                <a:solidFill>
+                  <a:srgbClr val="1A2733"/>
+                </a:solidFill>
+                <a:latin typeface="Calibri"/>
+                <a:ea typeface="Calibri"/>
+              </a:rPr>
+              <a:t>同样 94 个工具，描述压缩后分别降到约 3,900（低压缩）与约 500（最激进）。</a:t>
+            </a:r>
+          </a:p>
+        </p:txBody>
+      </p:sp>
+      <p:sp>
+        <p:nvSpPr>
+          <p:cNvPr id="13" name="TextBox 12"/>
+          <p:cNvSpPr txBox="1"/>
+          <p:nvPr/>
+        </p:nvSpPr>
+        <p:spPr>
+          <a:xfrm>
+            <a:off x="4486656" y="3822191"/>
+            <a:ext cx="3215640" cy="713232"/>
+          </a:xfrm>
+          <a:prstGeom prst="rect">
+            <a:avLst/>
+          </a:prstGeom>
+          <a:noFill/>
+        </p:spPr>
+        <p:txBody>
+          <a:bodyPr wrap="square" lIns="45720" rIns="45720" tIns="18288" bIns="18288">
+            <a:spAutoFit/>
+          </a:bodyPr>
+          <a:lstStyle/>
+          <a:p>
+            <a:pPr algn="l"/>
+            <a:r>
+              <a:rPr sz="1100" b="0" i="0">
+                <a:solidFill>
+                  <a:srgbClr val="51606E"/>
+                </a:solidFill>
+                <a:latin typeface="Calibri"/>
+                <a:ea typeface="Calibri"/>
+              </a:rPr>
+              <a:t>边界：同源同场景。压缩是牺牲描述细节换上下文，而描述质量直接影响模型会不会误调（见第 4 章），不是免费。</a:t>
+            </a:r>
+          </a:p>
+        </p:txBody>
+      </p:sp>
+      <p:sp>
+        <p:nvSpPr>
+          <p:cNvPr id="14" name="Rounded Rectangle 13"/>
+          <p:cNvSpPr/>
+          <p:nvPr/>
+        </p:nvSpPr>
+        <p:spPr>
+          <a:xfrm>
+            <a:off x="8141208" y="2194560"/>
+            <a:ext cx="3544824" cy="2395728"/>
+          </a:xfrm>
+          <a:prstGeom prst="roundRect">
+            <a:avLst>
+              <a:gd name="adj" fmla="val 4000"/>
+            </a:avLst>
+          </a:prstGeom>
+          <a:solidFill>
+            <a:srgbClr val="F3F8FA"/>
+          </a:solidFill>
+          <a:ln w="12700">
+            <a:solidFill>
+              <a:srgbClr val="D6E1E8"/>
+            </a:solidFill>
+          </a:ln>
+          <a:effectLst/>
+        </p:spPr>
+        <p:style>
+          <a:lnRef idx="1">
+            <a:schemeClr val="accent1"/>
+          </a:lnRef>
+          <a:fillRef idx="3">
+            <a:schemeClr val="accent1"/>
+          </a:fillRef>
+          <a:effectRef idx="2">
+            <a:schemeClr val="accent1"/>
+          </a:effectRef>
+          <a:fontRef idx="minor">
+            <a:schemeClr val="lt1"/>
+          </a:fontRef>
+        </p:style>
+        <p:txBody>
+          <a:bodyPr rtlCol="0" anchor="ctr"/>
+          <a:lstStyle/>
+          <a:p>
+            <a:pPr algn="ctr"/>
+          </a:p>
+        </p:txBody>
+      </p:sp>
+      <p:sp>
+        <p:nvSpPr>
+          <p:cNvPr id="15" name="TextBox 14"/>
+          <p:cNvSpPr txBox="1"/>
+          <p:nvPr/>
+        </p:nvSpPr>
+        <p:spPr>
+          <a:xfrm>
+            <a:off x="8305800" y="2340864"/>
+            <a:ext cx="3215640" cy="566928"/>
+          </a:xfrm>
+          <a:prstGeom prst="rect">
+            <a:avLst/>
+          </a:prstGeom>
+          <a:noFill/>
+        </p:spPr>
+        <p:txBody>
+          <a:bodyPr wrap="square" lIns="45720" rIns="45720" tIns="18288" bIns="18288">
+            <a:spAutoFit/>
+          </a:bodyPr>
+          <a:lstStyle/>
+          <a:p>
+            <a:r>
+              <a:rPr sz="2500" b="1" i="0">
+                <a:solidFill>
+                  <a:srgbClr val="128199"/>
+                </a:solidFill>
+                <a:latin typeface="Cambria"/>
+                <a:ea typeface="Cambria"/>
+              </a:rPr>
+              <a:t>1–2ms</a:t>
+            </a:r>
+            <a:r>
+              <a:rPr sz="1200" b="0" i="0">
+                <a:solidFill>
+                  <a:srgbClr val="51606E"/>
+                </a:solidFill>
+                <a:latin typeface="Calibri"/>
+                <a:ea typeface="Calibri"/>
+              </a:rPr>
+              <a:t>  / 会话</a:t>
+            </a:r>
+          </a:p>
+        </p:txBody>
+      </p:sp>
+      <p:sp>
+        <p:nvSpPr>
+          <p:cNvPr id="16" name="TextBox 15"/>
+          <p:cNvSpPr txBox="1"/>
+          <p:nvPr/>
+        </p:nvSpPr>
+        <p:spPr>
+          <a:xfrm>
+            <a:off x="8305800" y="2980944"/>
+            <a:ext cx="3215640" cy="822960"/>
+          </a:xfrm>
+          <a:prstGeom prst="rect">
+            <a:avLst/>
+          </a:prstGeom>
+          <a:noFill/>
+        </p:spPr>
+        <p:txBody>
+          <a:bodyPr wrap="square" lIns="45720" rIns="45720" tIns="18288" bIns="18288">
+            <a:spAutoFit/>
+          </a:bodyPr>
+          <a:lstStyle/>
+          <a:p>
+            <a:pPr algn="l"/>
+            <a:r>
+              <a:rPr sz="1150" b="0" i="0">
+                <a:solidFill>
+                  <a:srgbClr val="1A2733"/>
+                </a:solidFill>
+                <a:latin typeface="Calibri"/>
+                <a:ea typeface="Calibri"/>
+              </a:rPr>
+              <a:t>MCP 流量经网关一跳的额外延迟（加密迭代调到约 100 次之后）。</a:t>
+            </a:r>
+          </a:p>
+        </p:txBody>
+      </p:sp>
+      <p:sp>
+        <p:nvSpPr>
+          <p:cNvPr id="17" name="TextBox 16"/>
+          <p:cNvSpPr txBox="1"/>
+          <p:nvPr/>
+        </p:nvSpPr>
+        <p:spPr>
+          <a:xfrm>
+            <a:off x="8305800" y="3822191"/>
+            <a:ext cx="3215640" cy="713232"/>
+          </a:xfrm>
+          <a:prstGeom prst="rect">
+            <a:avLst/>
+          </a:prstGeom>
+          <a:noFill/>
+        </p:spPr>
+        <p:txBody>
+          <a:bodyPr wrap="square" lIns="45720" rIns="45720" tIns="18288" bIns="18288">
+            <a:spAutoFit/>
+          </a:bodyPr>
+          <a:lstStyle/>
+          <a:p>
+            <a:pPr algn="l"/>
+            <a:r>
+              <a:rPr sz="1100" b="0" i="0">
+                <a:solidFill>
+                  <a:srgbClr val="51606E"/>
+                </a:solidFill>
+                <a:latin typeface="Calibri"/>
+                <a:ea typeface="Calibri"/>
+              </a:rPr>
+              <a:t>边界：Envoy AI Gateway 官方基准 2025-12-08，M1 八核、echo 工具、按会话计。默认 10 万次KDF 迭代下为数十毫秒。单机基准，不能当生产 SLA。</a:t>
+            </a:r>
+          </a:p>
+        </p:txBody>
+      </p:sp>
+      <p:sp>
+        <p:nvSpPr>
+          <p:cNvPr id="18" name="Rounded Rectangle 17"/>
+          <p:cNvSpPr/>
+          <p:nvPr/>
+        </p:nvSpPr>
+        <p:spPr>
+          <a:xfrm>
+            <a:off x="502920" y="4828032"/>
+            <a:ext cx="11183112" cy="1170432"/>
+          </a:xfrm>
+          <a:prstGeom prst="roundRect">
+            <a:avLst>
+              <a:gd name="adj" fmla="val 4000"/>
+            </a:avLst>
+          </a:prstGeom>
+          <a:solidFill>
+            <a:srgbClr val="EAF3F5"/>
+          </a:solidFill>
+          <a:ln w="12700">
+            <a:solidFill>
+              <a:srgbClr val="128199"/>
+            </a:solidFill>
+          </a:ln>
+          <a:effectLst/>
+        </p:spPr>
+        <p:style>
+          <a:lnRef idx="1">
+            <a:schemeClr val="accent1"/>
+          </a:lnRef>
+          <a:fillRef idx="3">
+            <a:schemeClr val="accent1"/>
+          </a:fillRef>
+          <a:effectRef idx="2">
+            <a:schemeClr val="accent1"/>
+          </a:effectRef>
+          <a:fontRef idx="minor">
+            <a:schemeClr val="lt1"/>
+          </a:fontRef>
+        </p:style>
+        <p:txBody>
+          <a:bodyPr rtlCol="0" anchor="ctr"/>
+          <a:lstStyle/>
+          <a:p>
+            <a:pPr algn="ctr"/>
+          </a:p>
+        </p:txBody>
+      </p:sp>
+      <p:sp>
+        <p:nvSpPr>
+          <p:cNvPr id="19" name="TextBox 18"/>
+          <p:cNvSpPr txBox="1"/>
+          <p:nvPr/>
+        </p:nvSpPr>
+        <p:spPr>
+          <a:xfrm>
+            <a:off x="713232" y="4956048"/>
+            <a:ext cx="10762488" cy="914400"/>
+          </a:xfrm>
+          <a:prstGeom prst="rect">
+            <a:avLst/>
+          </a:prstGeom>
+          <a:noFill/>
+        </p:spPr>
+        <p:txBody>
+          <a:bodyPr wrap="square" lIns="45720" rIns="45720" tIns="18288" bIns="18288">
+            <a:spAutoFit/>
+          </a:bodyPr>
+          <a:lstStyle/>
+          <a:p>
+            <a:pPr algn="l"/>
+            <a:r>
+              <a:rPr sz="1200" b="1" i="0">
+                <a:solidFill>
+                  <a:srgbClr val="0E4D64"/>
+                </a:solidFill>
+                <a:latin typeface="Calibri"/>
+                <a:ea typeface="Calibri"/>
+              </a:rPr>
+              <a:t>这三个数改变的判断：</a:t>
+            </a:r>
+          </a:p>
+          <a:p>
+            <a:pPr algn="l"/>
+            <a:r>
+              <a:rPr sz="1150" b="0" i="0">
+                <a:solidFill>
+                  <a:srgbClr val="1A2733"/>
+                </a:solidFill>
+                <a:latin typeface="Calibri"/>
+                <a:ea typeface="Calibri"/>
+              </a:rPr>
+              <a:t>① 别把工具堆进一个 server——工具数直接乘进每轮上下文，90+ 工具光定义就吃掉 200k 窗口近 9%，接三个就可能过半。② 网关那一跳通常不是瓶颈，客户拿「多一层代理会不会慢」反对时，真正该谈的是加密配置。③ 选型先问「暴露多少工具」——比「支持哪些功能」更能预测实际成本。</a:t>
+            </a:r>
+          </a:p>
+        </p:txBody>
+      </p:sp>
+      <p:sp>
+        <p:nvSpPr>
+          <p:cNvPr id="20" name="TextBox 19"/>
+          <p:cNvSpPr txBox="1"/>
+          <p:nvPr/>
+        </p:nvSpPr>
+        <p:spPr>
+          <a:xfrm>
+            <a:off x="502920" y="6473952"/>
+            <a:ext cx="6400800" cy="274320"/>
+          </a:xfrm>
+          <a:prstGeom prst="rect">
+            <a:avLst/>
+          </a:prstGeom>
+          <a:noFill/>
+        </p:spPr>
+        <p:txBody>
+          <a:bodyPr wrap="square" lIns="45720" rIns="45720" tIns="18288" bIns="18288">
+            <a:spAutoFit/>
+          </a:bodyPr>
+          <a:lstStyle/>
+          <a:p>
+            <a:r>
+              <a:rPr sz="900" b="0" i="0">
+                <a:solidFill>
+                  <a:srgbClr val="51606E"/>
+                </a:solidFill>
+                <a:latin typeface="Calibri"/>
+                <a:ea typeface="Calibri"/>
+              </a:rPr>
+              <a:t>MCP 讲义 · 模型上下文协议</a:t>
+            </a:r>
+          </a:p>
+        </p:txBody>
+      </p:sp>
+      <p:sp>
+        <p:nvSpPr>
+          <p:cNvPr id="21" name="TextBox 20"/>
+          <p:cNvSpPr txBox="1"/>
+          <p:nvPr/>
+        </p:nvSpPr>
+        <p:spPr>
+          <a:xfrm>
+            <a:off x="7223760" y="6473952"/>
+            <a:ext cx="4480560" cy="274320"/>
+          </a:xfrm>
+          <a:prstGeom prst="rect">
+            <a:avLst/>
+          </a:prstGeom>
+          <a:noFill/>
+        </p:spPr>
+        <p:txBody>
+          <a:bodyPr wrap="square" lIns="45720" rIns="45720" tIns="18288" bIns="18288">
+            <a:spAutoFit/>
+          </a:bodyPr>
+          <a:lstStyle/>
+          <a:p>
+            <a:pPr algn="r"/>
+            <a:r>
+              <a:rPr sz="900" b="0" i="0">
+                <a:solidFill>
+                  <a:srgbClr val="51606E"/>
+                </a:solidFill>
+                <a:latin typeface="Calibri"/>
+                <a:ea typeface="Calibri"/>
+              </a:rPr>
+              <a:t>第 5 章 · 生产落地</a:t>
             </a:r>
           </a:p>
         </p:txBody>
